--- a/context-budget/context-budget.pptx
+++ b/context-budget/context-budget.pptx
@@ -1920,7 +1920,7 @@
                 <a:ea typeface="Malgun Gothic" pitchFamily="34" charset="-122"/>
                 <a:cs typeface="Malgun Gothic" pitchFamily="34" charset="-120"/>
               </a:rPr>
-              <a:t>대단원 5 · 에이전트 시스템 마스터 · 하네스 톺아보기 ④</a:t>
+              <a:t>대단원 5 · 에이전트 시스템 마스터 · 하네스 돌아보기 ④</a:t>
             </a:r>
             <a:endParaRPr lang="en-US" sz="1400" dirty="0"/>
           </a:p>
@@ -3948,7 +3948,7 @@
                 <a:ea typeface="Malgun Gothic" pitchFamily="34" charset="-122"/>
                 <a:cs typeface="Malgun Gothic" pitchFamily="34" charset="-120"/>
               </a:rPr>
-              <a:t>에이전트 하네스 톺아보기 ④ — 여기까지</a:t>
+              <a:t>에이전트 하네스 돌아보기 ④ — 여기까지</a:t>
             </a:r>
             <a:endParaRPr lang="en-US" sz="1800" dirty="0"/>
           </a:p>

--- a/context-budget/context-budget.pptx
+++ b/context-budget/context-budget.pptx
@@ -1920,7 +1920,7 @@
                 <a:ea typeface="Malgun Gothic" pitchFamily="34" charset="-122"/>
                 <a:cs typeface="Malgun Gothic" pitchFamily="34" charset="-120"/>
               </a:rPr>
-              <a:t>대단원 5 · 에이전트 시스템 마스터 · 하네스 돌아보기 ④</a:t>
+              <a:t>대단원 5 · 에이전트 시스템 마스터 · 하네스 톺아보기 ④</a:t>
             </a:r>
             <a:endParaRPr lang="en-US" sz="1400" dirty="0"/>
           </a:p>
@@ -3948,7 +3948,7 @@
                 <a:ea typeface="Malgun Gothic" pitchFamily="34" charset="-122"/>
                 <a:cs typeface="Malgun Gothic" pitchFamily="34" charset="-120"/>
               </a:rPr>
-              <a:t>에이전트 하네스 돌아보기 ④ — 여기까지</a:t>
+              <a:t>에이전트 하네스 톺아보기 ④ — 여기까지</a:t>
             </a:r>
             <a:endParaRPr lang="en-US" sz="1800" dirty="0"/>
           </a:p>
